--- a/deliverables/launch-sentiment-deck.pptx
+++ b/deliverables/launch-sentiment-deck.pptx
@@ -3865,6 +3865,14 @@
             </a:pPr>
             <a:r>
               <a:t>When it trips, read the theme mix, not the reviews: the cause is named within hours</a:t>
+            </a:r>
+          </a:p>
+          <a:p>
+            <a:pPr>
+              <a:defRPr sz="1800"/>
+            </a:pPr>
+            <a:r>
+              <a:t>The thumbs-up is blunt, but that is about levels — a 12-point drop is still a 12-point drop</a:t>
             </a:r>
           </a:p>
           <a:p>

--- a/deliverables/launch-sentiment-deck.pptx
+++ b/deliverables/launch-sentiment-deck.pptx
@@ -3566,6 +3566,14 @@
         <p:txBody>
           <a:bodyPr/>
           <a:lstStyle/>
+          <a:p>
+            <a:pPr>
+              <a:defRPr sz="1800"/>
+            </a:pPr>
+            <a:r>
+              <a:t>A good outcome — better than forcing a fake finding</a:t>
+            </a:r>
+          </a:p>
           <a:p>
             <a:pPr>
               <a:defRPr sz="1800"/>
